--- a/TP3/TP_Sprint2_Presentacion_Resultados.pptx
+++ b/TP3/TP_Sprint2_Presentacion_Resultados.pptx
@@ -2964,7 +2964,7 @@
             </a:pPr>
             <a:r>
               <a:rPr lang="en-US"/>
-              <a:t>Estos tres ejemplos vienen de errores_mal (tweets del test manual mal clasificados por el mejor modelo, TextBlob). Sirven para mostrar limitaciones concretas: sarcasmo/contraste implícito, tweets puramente informativos, y polaridad léxica débil en palabras coloquiales.</a:t>
+              <a:t>Estos tres ejemplos son reales, tomados de errores_mal (tweets del test manual mal clasificados por el mejor modelo, TextBlob) y de la categorización heurística de conteo_categorias_df. De los 498 tweets del test manual, 189 (38.0%) quedan mal clasificados: 118 sin patrón heurístico claro, 63 con negación, 13 con contraste/sarcasmo y 2 con sentimiento mixto.</a:t>
             </a:r>
             <a:endParaRPr/>
           </a:p>
@@ -3122,7 +3122,7 @@
             </a:pPr>
             <a:r>
               <a:rPr lang="en-US"/>
-              <a:t>Patrón que se repite en los 5 ejemplos: sarcasmo, negación implícita, sentimiento mixto/progresivo y polaridad léxica débil son los cuatro tipos de error más comunes. Ningún modelo de los cuatro (ni siquiera TextBlob) maneja bien estos casos — es una limitación de todo el enfoque léxico/estadístico, no de una implementación puntual.</a:t>
+              <a:t>La categoría dominante entre los errores ("Otro / jerga / sin patrón claro", 118 de 189 casos) sugiere que la mayoría de las fallas no responde a negación o contraste explícitos, sino a casos más sutiles: jerga deportiva, expresiones hechas ("good riddance"), y la frontera difusa entre neutral y positivo/negativo leve. Ningún modelo de los cuatro maneja bien estos casos — es una limitación de todo el enfoque léxico/estadístico, no de una implementación puntual.</a:t>
             </a:r>
             <a:endParaRPr/>
           </a:p>
@@ -3817,7 +3817,7 @@
   <p:cSld>
     <p:spTree>
       <p:nvGrpSpPr>
-        <p:cNvPr id="547" name="Shape 547"/>
+        <p:cNvPr id="546" name="Shape 546"/>
         <p:cNvGrpSpPr/>
         <p:nvPr/>
       </p:nvGrpSpPr>
@@ -3831,7 +3831,7 @@
       </p:grpSpPr>
       <p:sp>
         <p:nvSpPr>
-          <p:cNvPr id="548" name="Google Shape;548;p23:notes"/>
+          <p:cNvPr id="547" name="Google Shape;547;p23:notes"/>
           <p:cNvSpPr/>
           <p:nvPr>
             <p:ph idx="2" type="sldImg"/>
@@ -3876,7 +3876,7 @@
       </p:sp>
       <p:sp>
         <p:nvSpPr>
-          <p:cNvPr id="549" name="Google Shape;549;p23:notes"/>
+          <p:cNvPr id="548" name="Google Shape;548;p23:notes"/>
           <p:cNvSpPr txBox="1"/>
           <p:nvPr>
             <p:ph idx="1" type="body"/>
@@ -3920,7 +3920,7 @@
       </p:sp>
       <p:sp>
         <p:nvSpPr>
-          <p:cNvPr id="550" name="Google Shape;550;p23:notes"/>
+          <p:cNvPr id="549" name="Google Shape;549;p23:notes"/>
           <p:cNvSpPr txBox="1"/>
           <p:nvPr>
             <p:ph idx="12" type="sldNum"/>
@@ -3975,7 +3975,7 @@
   <p:cSld>
     <p:spTree>
       <p:nvGrpSpPr>
-        <p:cNvPr id="556" name="Shape 556"/>
+        <p:cNvPr id="555" name="Shape 555"/>
         <p:cNvGrpSpPr/>
         <p:nvPr/>
       </p:nvGrpSpPr>
@@ -3989,7 +3989,7 @@
       </p:grpSpPr>
       <p:sp>
         <p:nvSpPr>
-          <p:cNvPr id="557" name="Google Shape;557;p24:notes"/>
+          <p:cNvPr id="556" name="Google Shape;556;p24:notes"/>
           <p:cNvSpPr/>
           <p:nvPr>
             <p:ph idx="2" type="sldImg"/>
@@ -4034,7 +4034,7 @@
       </p:sp>
       <p:sp>
         <p:nvSpPr>
-          <p:cNvPr id="558" name="Google Shape;558;p24:notes"/>
+          <p:cNvPr id="557" name="Google Shape;557;p24:notes"/>
           <p:cNvSpPr txBox="1"/>
           <p:nvPr>
             <p:ph idx="1" type="body"/>
@@ -4070,7 +4070,7 @@
             </a:pPr>
             <a:r>
               <a:rPr lang="en-US"/>
-              <a:t>Pregunta más incómoda y más probable. Responder con seguridad: reconocer el gap, explicar las dos causas plausibles, y mostrar que ya se identificó una acción concreta de verificación. Eso demuestra pensamiento crítico, que es lo que se evalúa.</a:t>
+              <a:t>Esta pregunta cambió de foco respecto de una revisión anterior: ya no hay dudas sobre USE_SAMPLE (confirmado False, dataset completo) ni sobre si el notebook corre de punta a punta (corre sin errores). Lo que sigue siendo cierto, y vale la pena explicar con seguridad, es que el techo de performance en test manual es estructural (falta la clase neutral en el train) y no un problema de tamaño de dataset ni de ejecución incompleta.</a:t>
             </a:r>
             <a:endParaRPr/>
           </a:p>
@@ -4078,7 +4078,7 @@
       </p:sp>
       <p:sp>
         <p:nvSpPr>
-          <p:cNvPr id="559" name="Google Shape;559;p24:notes"/>
+          <p:cNvPr id="558" name="Google Shape;558;p24:notes"/>
           <p:cNvSpPr txBox="1"/>
           <p:nvPr>
             <p:ph idx="12" type="sldNum"/>
@@ -4133,7 +4133,7 @@
   <p:cSld>
     <p:spTree>
       <p:nvGrpSpPr>
-        <p:cNvPr id="571" name="Shape 571"/>
+        <p:cNvPr id="570" name="Shape 570"/>
         <p:cNvGrpSpPr/>
         <p:nvPr/>
       </p:nvGrpSpPr>
@@ -4147,7 +4147,7 @@
       </p:grpSpPr>
       <p:sp>
         <p:nvSpPr>
-          <p:cNvPr id="572" name="Google Shape;572;p25:notes"/>
+          <p:cNvPr id="571" name="Google Shape;571;p25:notes"/>
           <p:cNvSpPr/>
           <p:nvPr>
             <p:ph idx="2" type="sldImg"/>
@@ -4192,7 +4192,7 @@
       </p:sp>
       <p:sp>
         <p:nvSpPr>
-          <p:cNvPr id="573" name="Google Shape;573;p25:notes"/>
+          <p:cNvPr id="572" name="Google Shape;572;p25:notes"/>
           <p:cNvSpPr txBox="1"/>
           <p:nvPr>
             <p:ph idx="1" type="body"/>
@@ -4236,7 +4236,7 @@
       </p:sp>
       <p:sp>
         <p:nvSpPr>
-          <p:cNvPr id="574" name="Google Shape;574;p25:notes"/>
+          <p:cNvPr id="573" name="Google Shape;573;p25:notes"/>
           <p:cNvSpPr txBox="1"/>
           <p:nvPr>
             <p:ph idx="12" type="sldNum"/>
@@ -4291,7 +4291,7 @@
   <p:cSld>
     <p:spTree>
       <p:nvGrpSpPr>
-        <p:cNvPr id="586" name="Shape 586"/>
+        <p:cNvPr id="585" name="Shape 585"/>
         <p:cNvGrpSpPr/>
         <p:nvPr/>
       </p:nvGrpSpPr>
@@ -4305,7 +4305,7 @@
       </p:grpSpPr>
       <p:sp>
         <p:nvSpPr>
-          <p:cNvPr id="587" name="Google Shape;587;p26:notes"/>
+          <p:cNvPr id="586" name="Google Shape;586;p26:notes"/>
           <p:cNvSpPr/>
           <p:nvPr>
             <p:ph idx="2" type="sldImg"/>
@@ -4350,7 +4350,7 @@
       </p:sp>
       <p:sp>
         <p:nvSpPr>
-          <p:cNvPr id="588" name="Google Shape;588;p26:notes"/>
+          <p:cNvPr id="587" name="Google Shape;587;p26:notes"/>
           <p:cNvSpPr txBox="1"/>
           <p:nvPr>
             <p:ph idx="1" type="body"/>
@@ -4394,7 +4394,7 @@
       </p:sp>
       <p:sp>
         <p:nvSpPr>
-          <p:cNvPr id="589" name="Google Shape;589;p26:notes"/>
+          <p:cNvPr id="588" name="Google Shape;588;p26:notes"/>
           <p:cNvSpPr txBox="1"/>
           <p:nvPr>
             <p:ph idx="12" type="sldNum"/>
@@ -4449,7 +4449,7 @@
   <p:cSld>
     <p:spTree>
       <p:nvGrpSpPr>
-        <p:cNvPr id="601" name="Shape 601"/>
+        <p:cNvPr id="600" name="Shape 600"/>
         <p:cNvGrpSpPr/>
         <p:nvPr/>
       </p:nvGrpSpPr>
@@ -4463,7 +4463,7 @@
       </p:grpSpPr>
       <p:sp>
         <p:nvSpPr>
-          <p:cNvPr id="602" name="Google Shape;602;p27:notes"/>
+          <p:cNvPr id="601" name="Google Shape;601;p27:notes"/>
           <p:cNvSpPr/>
           <p:nvPr>
             <p:ph idx="2" type="sldImg"/>
@@ -4508,7 +4508,7 @@
       </p:sp>
       <p:sp>
         <p:nvSpPr>
-          <p:cNvPr id="603" name="Google Shape;603;p27:notes"/>
+          <p:cNvPr id="602" name="Google Shape;602;p27:notes"/>
           <p:cNvSpPr txBox="1"/>
           <p:nvPr>
             <p:ph idx="1" type="body"/>
@@ -4552,7 +4552,7 @@
       </p:sp>
       <p:sp>
         <p:nvSpPr>
-          <p:cNvPr id="604" name="Google Shape;604;p27:notes"/>
+          <p:cNvPr id="603" name="Google Shape;603;p27:notes"/>
           <p:cNvSpPr txBox="1"/>
           <p:nvPr>
             <p:ph idx="12" type="sldNum"/>
@@ -4607,7 +4607,7 @@
   <p:cSld>
     <p:spTree>
       <p:nvGrpSpPr>
-        <p:cNvPr id="616" name="Shape 616"/>
+        <p:cNvPr id="615" name="Shape 615"/>
         <p:cNvGrpSpPr/>
         <p:nvPr/>
       </p:nvGrpSpPr>
@@ -4621,7 +4621,7 @@
       </p:grpSpPr>
       <p:sp>
         <p:nvSpPr>
-          <p:cNvPr id="617" name="Google Shape;617;p28:notes"/>
+          <p:cNvPr id="616" name="Google Shape;616;p28:notes"/>
           <p:cNvSpPr/>
           <p:nvPr>
             <p:ph idx="2" type="sldImg"/>
@@ -4666,7 +4666,7 @@
       </p:sp>
       <p:sp>
         <p:nvSpPr>
-          <p:cNvPr id="618" name="Google Shape;618;p28:notes"/>
+          <p:cNvPr id="617" name="Google Shape;617;p28:notes"/>
           <p:cNvSpPr txBox="1"/>
           <p:nvPr>
             <p:ph idx="1" type="body"/>
@@ -4710,7 +4710,7 @@
       </p:sp>
       <p:sp>
         <p:nvSpPr>
-          <p:cNvPr id="619" name="Google Shape;619;p28:notes"/>
+          <p:cNvPr id="618" name="Google Shape;618;p28:notes"/>
           <p:cNvSpPr txBox="1"/>
           <p:nvPr>
             <p:ph idx="12" type="sldNum"/>
@@ -4765,7 +4765,7 @@
   <p:cSld>
     <p:spTree>
       <p:nvGrpSpPr>
-        <p:cNvPr id="631" name="Shape 631"/>
+        <p:cNvPr id="630" name="Shape 630"/>
         <p:cNvGrpSpPr/>
         <p:nvPr/>
       </p:nvGrpSpPr>
@@ -4779,7 +4779,7 @@
       </p:grpSpPr>
       <p:sp>
         <p:nvSpPr>
-          <p:cNvPr id="632" name="Google Shape;632;p29:notes"/>
+          <p:cNvPr id="631" name="Google Shape;631;p29:notes"/>
           <p:cNvSpPr/>
           <p:nvPr>
             <p:ph idx="2" type="sldImg"/>
@@ -4824,7 +4824,7 @@
       </p:sp>
       <p:sp>
         <p:nvSpPr>
-          <p:cNvPr id="633" name="Google Shape;633;p29:notes"/>
+          <p:cNvPr id="632" name="Google Shape;632;p29:notes"/>
           <p:cNvSpPr txBox="1"/>
           <p:nvPr>
             <p:ph idx="1" type="body"/>
@@ -4868,7 +4868,7 @@
       </p:sp>
       <p:sp>
         <p:nvSpPr>
-          <p:cNvPr id="634" name="Google Shape;634;p29:notes"/>
+          <p:cNvPr id="633" name="Google Shape;633;p29:notes"/>
           <p:cNvSpPr txBox="1"/>
           <p:nvPr>
             <p:ph idx="12" type="sldNum"/>
@@ -5081,7 +5081,7 @@
   <p:cSld>
     <p:spTree>
       <p:nvGrpSpPr>
-        <p:cNvPr id="646" name="Shape 646"/>
+        <p:cNvPr id="645" name="Shape 645"/>
         <p:cNvGrpSpPr/>
         <p:nvPr/>
       </p:nvGrpSpPr>
@@ -5095,7 +5095,7 @@
       </p:grpSpPr>
       <p:sp>
         <p:nvSpPr>
-          <p:cNvPr id="647" name="Google Shape;647;p30:notes"/>
+          <p:cNvPr id="646" name="Google Shape;646;p30:notes"/>
           <p:cNvSpPr/>
           <p:nvPr>
             <p:ph idx="2" type="sldImg"/>
@@ -5140,7 +5140,7 @@
       </p:sp>
       <p:sp>
         <p:nvSpPr>
-          <p:cNvPr id="648" name="Google Shape;648;p30:notes"/>
+          <p:cNvPr id="647" name="Google Shape;647;p30:notes"/>
           <p:cNvSpPr txBox="1"/>
           <p:nvPr>
             <p:ph idx="1" type="body"/>
@@ -5184,7 +5184,7 @@
       </p:sp>
       <p:sp>
         <p:nvSpPr>
-          <p:cNvPr id="649" name="Google Shape;649;p30:notes"/>
+          <p:cNvPr id="648" name="Google Shape;648;p30:notes"/>
           <p:cNvSpPr txBox="1"/>
           <p:nvPr>
             <p:ph idx="12" type="sldNum"/>
@@ -5239,7 +5239,7 @@
   <p:cSld>
     <p:spTree>
       <p:nvGrpSpPr>
-        <p:cNvPr id="661" name="Shape 661"/>
+        <p:cNvPr id="660" name="Shape 660"/>
         <p:cNvGrpSpPr/>
         <p:nvPr/>
       </p:nvGrpSpPr>
@@ -5253,7 +5253,7 @@
       </p:grpSpPr>
       <p:sp>
         <p:nvSpPr>
-          <p:cNvPr id="662" name="Google Shape;662;p31:notes"/>
+          <p:cNvPr id="661" name="Google Shape;661;p31:notes"/>
           <p:cNvSpPr/>
           <p:nvPr>
             <p:ph idx="2" type="sldImg"/>
@@ -5298,7 +5298,7 @@
       </p:sp>
       <p:sp>
         <p:nvSpPr>
-          <p:cNvPr id="663" name="Google Shape;663;p31:notes"/>
+          <p:cNvPr id="662" name="Google Shape;662;p31:notes"/>
           <p:cNvSpPr txBox="1"/>
           <p:nvPr>
             <p:ph idx="1" type="body"/>
@@ -5334,7 +5334,7 @@
             </a:pPr>
             <a:r>
               <a:rPr lang="en-US"/>
-              <a:t>Cierre fuerte: mostrar que el equipo ya tiene un plan concreto y priorizado, no una lista genérica de 'cosas que se podrían hacer'.</a:t>
+              <a:t>Cierre fuerte: mostrar que el equipo ya tiene un plan concreto y priorizado, no una lista genérica de 'cosas que se podrían hacer'. Ya no incluye 'correr con el dataset completo' porque esa corrida ya se hizo y está confirmada.</a:t>
             </a:r>
             <a:endParaRPr/>
           </a:p>
@@ -5342,7 +5342,7 @@
       </p:sp>
       <p:sp>
         <p:nvSpPr>
-          <p:cNvPr id="664" name="Google Shape;664;p31:notes"/>
+          <p:cNvPr id="663" name="Google Shape;663;p31:notes"/>
           <p:cNvSpPr txBox="1"/>
           <p:nvPr>
             <p:ph idx="12" type="sldNum"/>
@@ -10389,7 +10389,7 @@
                 <a:cs typeface="Cambria"/>
                 <a:sym typeface="Cambria"/>
               </a:rPr>
-              <a:t>58.6%</a:t>
+              <a:t>59.0%</a:t>
             </a:r>
             <a:endParaRPr b="0" i="0" sz="4600" u="none" cap="none" strike="noStrike">
               <a:solidFill>
@@ -10604,7 +10604,7 @@
                 <a:cs typeface="Cambria"/>
                 <a:sym typeface="Cambria"/>
               </a:rPr>
-              <a:t>0.456</a:t>
+              <a:t>0.458</a:t>
             </a:r>
             <a:endParaRPr b="0" i="0" sz="3000" u="none" cap="none" strike="noStrike">
               <a:solidFill>
@@ -12467,7 +12467,7 @@
                 <a:cs typeface="Cambria"/>
                 <a:sym typeface="Cambria"/>
               </a:rPr>
-              <a:t>0.686</a:t>
+              <a:t>0.699</a:t>
             </a:r>
             <a:endParaRPr b="0" i="0" sz="2400" u="none" cap="none" strike="noStrike">
               <a:solidFill>
@@ -12535,7 +12535,7 @@
         <p:spPr>
           <a:xfrm>
             <a:off x="3017520" y="2834640"/>
-            <a:ext cx="1630924" cy="256032"/>
+            <a:ext cx="1661831" cy="256032"/>
           </a:xfrm>
           <a:prstGeom prst="roundRect">
             <a:avLst>
@@ -12798,7 +12798,7 @@
                 <a:cs typeface="Cambria"/>
                 <a:sym typeface="Cambria"/>
               </a:rPr>
-              <a:t>0.530</a:t>
+              <a:t>0.504</a:t>
             </a:r>
             <a:endParaRPr b="0" i="0" sz="2400" u="none" cap="none" strike="noStrike">
               <a:solidFill>
@@ -12866,7 +12866,7 @@
         <p:spPr>
           <a:xfrm>
             <a:off x="3017520" y="4251960"/>
-            <a:ext cx="1260043" cy="256032"/>
+            <a:ext cx="1198230" cy="256032"/>
           </a:xfrm>
           <a:prstGeom prst="roundRect">
             <a:avLst>
@@ -13129,7 +13129,7 @@
                 <a:cs typeface="Cambria"/>
                 <a:sym typeface="Cambria"/>
               </a:rPr>
-              <a:t>0.408</a:t>
+              <a:t>0.402</a:t>
             </a:r>
             <a:endParaRPr b="0" i="0" sz="2400" u="none" cap="none" strike="noStrike">
               <a:solidFill>
@@ -13197,7 +13197,7 @@
         <p:spPr>
           <a:xfrm>
             <a:off x="3017520" y="5669280"/>
-            <a:ext cx="969996" cy="256032"/>
+            <a:ext cx="955731" cy="256032"/>
           </a:xfrm>
           <a:prstGeom prst="roundRect">
             <a:avLst>
@@ -13922,7 +13922,7 @@
                 <a:cs typeface="Calibri"/>
                 <a:sym typeface="Calibri"/>
               </a:rPr>
-              <a:t>0.530</a:t>
+              <a:t>0.491</a:t>
             </a:r>
             <a:endParaRPr b="0" i="0" sz="1300" u="none" cap="none" strike="noStrike">
               <a:solidFill>
@@ -14163,7 +14163,7 @@
                 <a:cs typeface="Calibri"/>
                 <a:sym typeface="Calibri"/>
               </a:rPr>
-              <a:t>0.519</a:t>
+              <a:t>0.491</a:t>
             </a:r>
             <a:endParaRPr b="0" i="0" sz="1300" u="none" cap="none" strike="noStrike">
               <a:solidFill>
@@ -14341,7 +14341,7 @@
                 <a:cs typeface="Cambria"/>
                 <a:sym typeface="Cambria"/>
               </a:rPr>
-              <a:t>"saddening"</a:t>
+              <a:t>"dissapointing"</a:t>
             </a:r>
             <a:endParaRPr b="0" i="0" sz="2000" u="none" cap="none" strike="noStrike">
               <a:solidFill>
@@ -14404,7 +14404,7 @@
                 <a:cs typeface="Calibri"/>
                 <a:sym typeface="Calibri"/>
               </a:rPr>
-              <a:t>0.493</a:t>
+              <a:t>0.490</a:t>
             </a:r>
             <a:endParaRPr b="0" i="0" sz="1300" u="none" cap="none" strike="noStrike">
               <a:solidFill>
@@ -15411,7 +15411,7 @@
                 <a:cs typeface="Calibri"/>
                 <a:sym typeface="Calibri"/>
               </a:rPr>
-              <a:t>PPMI mide co-ocurrencia, no significado: ambas son palabras de sentimiento muy frecuentes que suelen aparecer juntas en frases contrastivas ("it's good, not bad"). La similitud coseno (slide anterior) es la que sí distingue la polaridad: good-bad (0.530) es más baja que good-great (0.686). Las dos métricas son complementarias, no intercambiables.</a:t>
+              <a:t>PPMI mide co-ocurrencia, no significado: ambas son palabras de sentimiento muy frecuentes que suelen aparecer juntas en frases contrastivas ("it's good, not bad"). La similitud coseno (slide anterior) es la que sí distingue la polaridad: good-bad (0.504) es más baja que good-great (0.699). Las dos métricas son complementarias, no intercambiables.</a:t>
             </a:r>
             <a:endParaRPr b="0" i="0" sz="1250" u="none" cap="none" strike="noStrike">
               <a:solidFill>
@@ -15776,7 +15776,7 @@
             <a:avLst/>
           </a:prstGeom>
           <a:solidFill>
-            <a:srgbClr val="E0245E"/>
+            <a:srgbClr val="00BA7C"/>
           </a:solidFill>
           <a:ln>
             <a:noFill/>
@@ -15853,7 +15853,7 @@
                 <a:cs typeface="Calibri"/>
                 <a:sym typeface="Calibri"/>
               </a:rPr>
-              <a:t>0</a:t>
+              <a:t>4</a:t>
             </a:r>
             <a:endParaRPr b="0" i="0" sz="1500" u="none" cap="none" strike="noStrike">
               <a:solidFill>
@@ -16211,7 +16211,7 @@
                 <a:cs typeface="Calibri"/>
                 <a:sym typeface="Calibri"/>
               </a:rPr>
-              <a:t>"7 hours of inkscape crashing, normally a very good program... but not today."</a:t>
+              <a:t>"Loves twitter"</a:t>
             </a:r>
             <a:endParaRPr b="0" i="0" sz="1200" u="none" cap="none" strike="noStrike">
               <a:solidFill>
@@ -16274,7 +16274,7 @@
                 <a:cs typeface="Calibri"/>
                 <a:sym typeface="Calibri"/>
               </a:rPr>
-              <a:t>Hipótesis: TextBlob probablemente ponderó "very good program" y neutralizó el resultado, sin captar el contraste ("crashing", "not today") que sí percibe un lector humano.</a:t>
+              <a:t>Categoría: "Otro / jerga / sin patrón claro" (62% de los 189 errores). Tweet cortísimo y sin verbo conjugado en tercera persona: el léxico de TextBlob no encuentra suficiente señal de polaridad y cae en neutral.</a:t>
             </a:r>
             <a:endParaRPr b="0" i="0" sz="1100" u="none" cap="none" strike="noStrike">
               <a:solidFill>
@@ -16355,7 +16355,7 @@
             <a:avLst/>
           </a:prstGeom>
           <a:solidFill>
-            <a:srgbClr val="F5A623"/>
+            <a:srgbClr val="00BA7C"/>
           </a:solidFill>
           <a:ln>
             <a:noFill/>
@@ -16432,7 +16432,7 @@
                 <a:cs typeface="Calibri"/>
                 <a:sym typeface="Calibri"/>
               </a:rPr>
-              <a:t>2</a:t>
+              <a:t>4</a:t>
             </a:r>
             <a:endParaRPr b="0" i="0" sz="1500" u="none" cap="none" strike="noStrike">
               <a:solidFill>
@@ -16587,7 +16587,7 @@
             <a:avLst/>
           </a:prstGeom>
           <a:solidFill>
-            <a:srgbClr val="00BA7C"/>
+            <a:srgbClr val="F5A623"/>
           </a:solidFill>
           <a:ln>
             <a:noFill/>
@@ -16664,7 +16664,7 @@
                 <a:cs typeface="Calibri"/>
                 <a:sym typeface="Calibri"/>
               </a:rPr>
-              <a:t>4</a:t>
+              <a:t>2</a:t>
             </a:r>
             <a:endParaRPr b="0" i="0" sz="1500" u="none" cap="none" strike="noStrike">
               <a:solidFill>
@@ -16790,7 +16790,7 @@
                 <a:cs typeface="Calibri"/>
                 <a:sym typeface="Calibri"/>
               </a:rPr>
-              <a:t>"Nike SB Blazer High "ACG" Custom - Brad Douglas"</a:t>
+              <a:t>"@wordwhizkid Lebron is a beast... nobody in the NBA comes even close."</a:t>
             </a:r>
             <a:endParaRPr b="0" i="0" sz="1200" u="none" cap="none" strike="noStrike">
               <a:solidFill>
@@ -16853,7 +16853,7 @@
                 <a:cs typeface="Calibri"/>
                 <a:sym typeface="Calibri"/>
               </a:rPr>
-              <a:t>Hipótesis: tweet puramente informativo (nombre de producto); el léxico de TextBlob puede asociar marcas/consumo con connotación positiva.</a:t>
+              <a:t>Categoría: "Negación" (33% de los errores, por la palabra "nobody"). El uso de "beast" como elogio (jerga deportiva) y una negación que en realidad refuerza el elogio ("nadie se le acerca") confunden al análisis léxico simple.</a:t>
             </a:r>
             <a:endParaRPr b="0" i="0" sz="1100" u="none" cap="none" strike="noStrike">
               <a:solidFill>
@@ -17369,7 +17369,7 @@
                 <a:cs typeface="Calibri"/>
                 <a:sym typeface="Calibri"/>
               </a:rPr>
-              <a:t>"omg. The commercials alone on ESPN are going to annoy me today."</a:t>
+              <a:t>"@ludajuice Lebron is a Beast, but I'm still cheering 4 the A..til the end."</a:t>
             </a:r>
             <a:endParaRPr b="0" i="0" sz="1200" u="none" cap="none" strike="noStrike">
               <a:solidFill>
@@ -17432,7 +17432,7 @@
                 <a:cs typeface="Calibri"/>
                 <a:sym typeface="Calibri"/>
               </a:rPr>
-              <a:t>Hipótesis: "annoy" tiene polaridad débil en el léxico de TextBlob y "omg" no es intrínsecamente negativo, resultando en neutral en vez de negativo.</a:t>
+              <a:t>Categoría: "Contraste / posible sarcasmo" (7% de los errores, por el conector "but"). El elogio inicial ("Beast") pesa más que el sentimiento real del autor (decepción/resignación por su equipo), y el resultado queda neutral.</a:t>
             </a:r>
             <a:endParaRPr b="0" i="0" sz="1100" u="none" cap="none" strike="noStrike">
               <a:solidFill>
@@ -18029,7 +18029,7 @@
             <a:avLst/>
           </a:prstGeom>
           <a:solidFill>
-            <a:srgbClr val="F5A623"/>
+            <a:srgbClr val="00BA7C"/>
           </a:solidFill>
           <a:ln>
             <a:noFill/>
@@ -18106,7 +18106,7 @@
                 <a:cs typeface="Calibri"/>
                 <a:sym typeface="Calibri"/>
               </a:rPr>
-              <a:t>2</a:t>
+              <a:t>4</a:t>
             </a:r>
             <a:endParaRPr b="0" i="0" sz="1500" u="none" cap="none" strike="noStrike">
               <a:solidFill>
@@ -18232,7 +18232,7 @@
                 <a:cs typeface="Calibri"/>
                 <a:sym typeface="Calibri"/>
               </a:rPr>
-              <a:t>"glad i didnt do Bay to Breakers today, it's 100 degrees out."</a:t>
+              <a:t>"Son has me looking at cars online. I hate car shopping. Would rather go to the dentist! Anyone with a good car at a good price to sell?"</a:t>
             </a:r>
             <a:endParaRPr b="0" i="0" sz="1200" u="none" cap="none" strike="noStrike">
               <a:solidFill>
@@ -18295,7 +18295,7 @@
                 <a:cs typeface="Calibri"/>
                 <a:sym typeface="Calibri"/>
               </a:rPr>
-              <a:t>Hipótesis: "glad" es fuertemente positivo y puede pesar más que la connotación negativa del calor extremo, derivando en neutral en vez de negativo.</a:t>
+              <a:t>Categoría: "Sentimiento mixto" (la más rara, sólo 2 de 189 casos). El tweet combina "hate" (negativo) con "good" repetido dos veces (positivo); el promedio de polaridad de TextBlob termina inclinándose hacia positivo pese a que el sentimiento real es negativo.</a:t>
             </a:r>
             <a:endParaRPr b="0" i="0" sz="1100" u="none" cap="none" strike="noStrike">
               <a:solidFill>
@@ -18376,7 +18376,7 @@
             <a:avLst/>
           </a:prstGeom>
           <a:solidFill>
-            <a:srgbClr val="F5A623"/>
+            <a:srgbClr val="E0245E"/>
           </a:solidFill>
           <a:ln>
             <a:noFill/>
@@ -18453,7 +18453,7 @@
                 <a:cs typeface="Calibri"/>
                 <a:sym typeface="Calibri"/>
               </a:rPr>
-              <a:t>2</a:t>
+              <a:t>0</a:t>
             </a:r>
             <a:endParaRPr b="0" i="0" sz="1500" u="none" cap="none" strike="noStrike">
               <a:solidFill>
@@ -18811,7 +18811,7 @@
                 <a:cs typeface="Calibri"/>
                 <a:sym typeface="Calibri"/>
               </a:rPr>
-              <a:t>"just started playing MLB 2K9... i thought it was gonna be horrible... but its actually not that bad."</a:t>
+              <a:t>"@Pittstock $GM good riddance. sad though."</a:t>
             </a:r>
             <a:endParaRPr b="0" i="0" sz="1200" u="none" cap="none" strike="noStrike">
               <a:solidFill>
@@ -18874,7 +18874,7 @@
                 <a:cs typeface="Calibri"/>
                 <a:sym typeface="Calibri"/>
               </a:rPr>
-              <a:t>Hipótesis: sentimiento mixto/progresivo (expectativa negativa → evaluación final positiva). El modelo capta el cierre positivo pero no el contraste completo, y termina sobrestimando la polaridad.</a:t>
+              <a:t>Categoría: "Sentimiento mixto" + "Contraste" (aparece en ambas listas). "Good riddance" es una expresión hecha (alivio, no elogio) que TextBlob interpreta literalmente como positiva, y no logra compensarlo con el "sad though" final.</a:t>
             </a:r>
             <a:endParaRPr b="0" i="0" sz="1100" u="none" cap="none" strike="noStrike">
               <a:solidFill>
@@ -23527,60 +23527,6 @@
           </a:p>
         </p:txBody>
       </p:sp>
-      <p:sp>
-        <p:nvSpPr>
-          <p:cNvPr id="546" name="Google Shape;546;p24"/>
-          <p:cNvSpPr/>
-          <p:nvPr/>
-        </p:nvSpPr>
-        <p:spPr>
-          <a:xfrm>
-            <a:off x="1188720" y="5047488"/>
-            <a:ext cx="10241280" cy="1005840"/>
-          </a:xfrm>
-          <a:prstGeom prst="rect">
-            <a:avLst/>
-          </a:prstGeom>
-          <a:noFill/>
-          <a:ln>
-            <a:noFill/>
-          </a:ln>
-        </p:spPr>
-        <p:txBody>
-          <a:bodyPr anchorCtr="0" anchor="t" bIns="0" lIns="0" spcFirstLastPara="1" rIns="0" wrap="square" tIns="0">
-            <a:noAutofit/>
-          </a:bodyPr>
-          <a:lstStyle/>
-          <a:p>
-            <a:pPr indent="0" lvl="0" marL="0" marR="0" rtl="0" algn="l">
-              <a:spcBef>
-                <a:spcPts val="0"/>
-              </a:spcBef>
-              <a:spcAft>
-                <a:spcPts val="0"/>
-              </a:spcAft>
-              <a:buClr>
-                <a:srgbClr val="E7EEF5"/>
-              </a:buClr>
-              <a:buSzPts val="1400"/>
-              <a:buFont typeface="Calibri"/>
-              <a:buNone/>
-            </a:pPr>
-            <a:r>
-              <a:t/>
-            </a:r>
-            <a:endParaRPr b="0" i="0" sz="1400" u="none" cap="none" strike="noStrike">
-              <a:solidFill>
-                <a:schemeClr val="dk1"/>
-              </a:solidFill>
-              <a:latin typeface="Calibri"/>
-              <a:ea typeface="Calibri"/>
-              <a:cs typeface="Calibri"/>
-              <a:sym typeface="Calibri"/>
-            </a:endParaRPr>
-          </a:p>
-        </p:txBody>
-      </p:sp>
     </p:spTree>
   </p:cSld>
   <p:clrMapOvr>
@@ -23601,7 +23547,7 @@
     </p:bg>
     <p:spTree>
       <p:nvGrpSpPr>
-        <p:cNvPr id="551" name="Shape 551"/>
+        <p:cNvPr id="550" name="Shape 550"/>
         <p:cNvGrpSpPr/>
         <p:nvPr/>
       </p:nvGrpSpPr>
@@ -23615,7 +23561,7 @@
       </p:grpSpPr>
       <p:sp>
         <p:nvSpPr>
-          <p:cNvPr id="552" name="Google Shape;552;p25"/>
+          <p:cNvPr id="551" name="Google Shape;551;p25"/>
           <p:cNvSpPr/>
           <p:nvPr/>
         </p:nvSpPr>
@@ -23658,7 +23604,7 @@
       </p:sp>
       <p:sp>
         <p:nvSpPr>
-          <p:cNvPr id="553" name="Google Shape;553;p25"/>
+          <p:cNvPr id="552" name="Google Shape;552;p25"/>
           <p:cNvSpPr/>
           <p:nvPr/>
         </p:nvSpPr>
@@ -23721,7 +23667,7 @@
       </p:sp>
       <p:sp>
         <p:nvSpPr>
-          <p:cNvPr id="554" name="Google Shape;554;p25"/>
+          <p:cNvPr id="553" name="Google Shape;553;p25"/>
           <p:cNvSpPr/>
           <p:nvPr/>
         </p:nvSpPr>
@@ -23784,7 +23730,7 @@
       </p:sp>
       <p:sp>
         <p:nvSpPr>
-          <p:cNvPr id="555" name="Google Shape;555;p25"/>
+          <p:cNvPr id="554" name="Google Shape;554;p25"/>
           <p:cNvSpPr/>
           <p:nvPr/>
         </p:nvSpPr>
@@ -23865,7 +23811,7 @@
     </p:bg>
     <p:spTree>
       <p:nvGrpSpPr>
-        <p:cNvPr id="560" name="Shape 560"/>
+        <p:cNvPr id="559" name="Shape 559"/>
         <p:cNvGrpSpPr/>
         <p:nvPr/>
       </p:nvGrpSpPr>
@@ -23879,7 +23825,7 @@
       </p:grpSpPr>
       <p:sp>
         <p:nvSpPr>
-          <p:cNvPr id="561" name="Google Shape;561;p26"/>
+          <p:cNvPr id="560" name="Google Shape;560;p26"/>
           <p:cNvSpPr/>
           <p:nvPr/>
         </p:nvSpPr>
@@ -23942,7 +23888,7 @@
       </p:sp>
       <p:sp>
         <p:nvSpPr>
-          <p:cNvPr id="562" name="Google Shape;562;p26"/>
+          <p:cNvPr id="561" name="Google Shape;561;p26"/>
           <p:cNvSpPr/>
           <p:nvPr/>
         </p:nvSpPr>
@@ -23985,7 +23931,7 @@
       </p:sp>
       <p:sp>
         <p:nvSpPr>
-          <p:cNvPr id="563" name="Google Shape;563;p26"/>
+          <p:cNvPr id="562" name="Google Shape;562;p26"/>
           <p:cNvSpPr/>
           <p:nvPr/>
         </p:nvSpPr>
@@ -24048,7 +23994,7 @@
       </p:sp>
       <p:sp>
         <p:nvSpPr>
-          <p:cNvPr id="564" name="Google Shape;564;p26"/>
+          <p:cNvPr id="563" name="Google Shape;563;p26"/>
           <p:cNvSpPr/>
           <p:nvPr/>
         </p:nvSpPr>
@@ -24095,7 +24041,7 @@
                 <a:cs typeface="Cambria"/>
                 <a:sym typeface="Cambria"/>
               </a:rPr>
-              <a:t>Estos accuracy (57–62%) parecen bajos para Sentiment140. ¿Por qué?</a:t>
+              <a:t>El accuracy en test manual (57–62%) parece bajo frente al accuracy de train/validación (74–78%). ¿Por qué?</a:t>
             </a:r>
             <a:endParaRPr b="0" i="0" sz="1900" u="none" cap="none" strike="noStrike">
               <a:solidFill>
@@ -24111,7 +24057,7 @@
       </p:sp>
       <p:sp>
         <p:nvSpPr>
-          <p:cNvPr id="565" name="Google Shape;565;p26"/>
+          <p:cNvPr id="564" name="Google Shape;564;p26"/>
           <p:cNvSpPr/>
           <p:nvPr/>
         </p:nvSpPr>
@@ -24163,7 +24109,7 @@
       </p:sp>
       <p:sp>
         <p:nvSpPr>
-          <p:cNvPr id="566" name="Google Shape;566;p26"/>
+          <p:cNvPr id="565" name="Google Shape;565;p26"/>
           <p:cNvSpPr/>
           <p:nvPr/>
         </p:nvSpPr>
@@ -24206,7 +24152,7 @@
       </p:sp>
       <p:sp>
         <p:nvSpPr>
-          <p:cNvPr id="567" name="Google Shape;567;p26"/>
+          <p:cNvPr id="566" name="Google Shape;566;p26"/>
           <p:cNvSpPr/>
           <p:nvPr/>
         </p:nvSpPr>
@@ -24269,7 +24215,7 @@
       </p:sp>
       <p:sp>
         <p:nvSpPr>
-          <p:cNvPr id="568" name="Google Shape;568;p26"/>
+          <p:cNvPr id="567" name="Google Shape;567;p26"/>
           <p:cNvSpPr/>
           <p:nvPr/>
         </p:nvSpPr>
@@ -24316,7 +24262,7 @@
                 <a:cs typeface="Calibri"/>
                 <a:sym typeface="Calibri"/>
               </a:rPr>
-              <a:t>Es una observación válida: están por debajo del ~78-80% que suele reportarse para TF-IDF + regresión logística sobre este dataset.</a:t>
+              <a:t>Confirmado: la corrida final se hizo con USE_SAMPLE=False sobre el dataset completo (1.6M tweets, 1.440.000 en el split de entrenamiento) — no es un problema de tamaño de muestra. La curva de aprendizaje (sección 9.3) lo respalda: entre 50.000 y 1,44M de tweets, el accuracy en test manual sólo mejora 1-2 puntos porcentuales, así que más datos del mismo tipo no cerraría la brecha.</a:t>
             </a:r>
             <a:endParaRPr b="0" i="0" sz="1350" u="none" cap="none" strike="noStrike">
               <a:solidFill>
@@ -24353,7 +24299,7 @@
                 <a:cs typeface="Calibri"/>
                 <a:sym typeface="Calibri"/>
               </a:rPr>
-              <a:t>Dos motivos probables: (1) acá se evalúa incluyendo la clase neutral, que la mayoría de los benchmarks publicados excluye (evalúan sólo el subconjunto binario positivo/negativo); (2) si el entrenamiento final corrió sobre una muestra reducida en vez de las 1.6M filas completas, el modelo tiene mucha menos señal para aprender.</a:t>
+              <a:t>La brecha real es entre conjuntos, no una corrida incompleta: BoW+NB llega a 0.767 de accuracy en validación pero cae a 0.584 en test manual. La causa es estructural, no de escala: el test manual es el único conjunto con clase neutral, y los tres modelos propios nunca vieron esa clase al entrenar (precision/recall = 0.00 en la clase 2).</a:t>
             </a:r>
             <a:endParaRPr b="0" i="0" sz="1350" u="none" cap="none" strike="noStrike">
               <a:solidFill>
@@ -24390,7 +24336,7 @@
                 <a:cs typeface="Calibri"/>
                 <a:sym typeface="Calibri"/>
               </a:rPr>
-              <a:t>Como referencia: si una porción relevante del test manual es neutral, el techo de accuracy para cualquier modelo que nunca prediga esa clase queda bastante por debajo del 100% — y nuestros modelos están, de hecho, por debajo incluso de ese techo teórico, lo que sugiere margen de mejora entrenando con el corpus completo.</a:t>
+              <a:t>Los intervalos de confianza bootstrap (sección 9.4) muestran además que los 498 tweets del test manual son pocos: los cuatro modelos tienen intervalos del 95% que se superponen ampliamente, así que parte de esta brecha puntual también es ruido de muestreo, no sólo la ausencia de la clase neutral.</a:t>
             </a:r>
             <a:endParaRPr b="0" i="0" sz="1350" u="none" cap="none" strike="noStrike">
               <a:solidFill>
@@ -24402,34 +24348,60 @@
               <a:sym typeface="Calibri"/>
             </a:endParaRPr>
           </a:p>
-          <a:p>
-            <a:pPr indent="-342900" lvl="0" marL="342900" marR="0" rtl="0" algn="l">
-              <a:spcBef>
-                <a:spcPts val="1200"/>
-              </a:spcBef>
-              <a:spcAft>
-                <a:spcPts val="0"/>
-              </a:spcAft>
-              <a:buClr>
-                <a:srgbClr val="16202B"/>
-              </a:buClr>
-              <a:buSzPts val="1350"/>
+        </p:txBody>
+      </p:sp>
+      <p:sp>
+        <p:nvSpPr>
+          <p:cNvPr id="568" name="Google Shape;568;p26"/>
+          <p:cNvSpPr/>
+          <p:nvPr/>
+        </p:nvSpPr>
+        <p:spPr>
+          <a:xfrm>
+            <a:off x="11368735" y="6400800"/>
+            <a:ext cx="548640" cy="274320"/>
+          </a:xfrm>
+          <a:prstGeom prst="rect">
+            <a:avLst/>
+          </a:prstGeom>
+          <a:noFill/>
+          <a:ln>
+            <a:noFill/>
+          </a:ln>
+        </p:spPr>
+        <p:txBody>
+          <a:bodyPr anchorCtr="0" anchor="ctr" bIns="0" lIns="0" spcFirstLastPara="1" rIns="0" wrap="square" tIns="0">
+            <a:noAutofit/>
+          </a:bodyPr>
+          <a:lstStyle/>
+          <a:p>
+            <a:pPr indent="0" lvl="0" marL="0" marR="0" rtl="0" algn="r">
+              <a:spcBef>
+                <a:spcPts val="0"/>
+              </a:spcBef>
+              <a:spcAft>
+                <a:spcPts val="0"/>
+              </a:spcAft>
+              <a:buClr>
+                <a:srgbClr val="8CA0B3"/>
+              </a:buClr>
+              <a:buSzPts val="1000"/>
               <a:buFont typeface="Calibri"/>
-              <a:buChar char="▪"/>
-            </a:pPr>
-            <a:r>
-              <a:rPr b="0" i="0" lang="en-US" sz="1350" u="none" cap="none" strike="noStrike">
-                <a:solidFill>
-                  <a:srgbClr val="16202B"/>
+              <a:buNone/>
+            </a:pPr>
+            <a:r>
+              <a:rPr b="0" i="0" lang="en-US" sz="1000" u="none" cap="none" strike="noStrike">
+                <a:solidFill>
+                  <a:srgbClr val="8CA0B3"/>
                 </a:solidFill>
                 <a:latin typeface="Calibri"/>
                 <a:ea typeface="Calibri"/>
                 <a:cs typeface="Calibri"/>
                 <a:sym typeface="Calibri"/>
               </a:rPr>
-              <a:t>Acción concreta: confirmar que la corrida reportada corresponde a USE_SAMPLE=False (dataset completo) antes de la entrega final.</a:t>
-            </a:r>
-            <a:endParaRPr b="0" i="0" sz="1350" u="none" cap="none" strike="noStrike">
+              <a:t>20</a:t>
+            </a:r>
+            <a:endParaRPr b="0" i="0" sz="1000" u="none" cap="none" strike="noStrike">
               <a:solidFill>
                 <a:schemeClr val="dk1"/>
               </a:solidFill>
@@ -24444,69 +24416,6 @@
       <p:sp>
         <p:nvSpPr>
           <p:cNvPr id="569" name="Google Shape;569;p26"/>
-          <p:cNvSpPr/>
-          <p:nvPr/>
-        </p:nvSpPr>
-        <p:spPr>
-          <a:xfrm>
-            <a:off x="11368735" y="6400800"/>
-            <a:ext cx="548640" cy="274320"/>
-          </a:xfrm>
-          <a:prstGeom prst="rect">
-            <a:avLst/>
-          </a:prstGeom>
-          <a:noFill/>
-          <a:ln>
-            <a:noFill/>
-          </a:ln>
-        </p:spPr>
-        <p:txBody>
-          <a:bodyPr anchorCtr="0" anchor="ctr" bIns="0" lIns="0" spcFirstLastPara="1" rIns="0" wrap="square" tIns="0">
-            <a:noAutofit/>
-          </a:bodyPr>
-          <a:lstStyle/>
-          <a:p>
-            <a:pPr indent="0" lvl="0" marL="0" marR="0" rtl="0" algn="r">
-              <a:spcBef>
-                <a:spcPts val="0"/>
-              </a:spcBef>
-              <a:spcAft>
-                <a:spcPts val="0"/>
-              </a:spcAft>
-              <a:buClr>
-                <a:srgbClr val="8CA0B3"/>
-              </a:buClr>
-              <a:buSzPts val="1000"/>
-              <a:buFont typeface="Calibri"/>
-              <a:buNone/>
-            </a:pPr>
-            <a:r>
-              <a:rPr b="0" i="0" lang="en-US" sz="1000" u="none" cap="none" strike="noStrike">
-                <a:solidFill>
-                  <a:srgbClr val="8CA0B3"/>
-                </a:solidFill>
-                <a:latin typeface="Calibri"/>
-                <a:ea typeface="Calibri"/>
-                <a:cs typeface="Calibri"/>
-                <a:sym typeface="Calibri"/>
-              </a:rPr>
-              <a:t>20</a:t>
-            </a:r>
-            <a:endParaRPr b="0" i="0" sz="1000" u="none" cap="none" strike="noStrike">
-              <a:solidFill>
-                <a:schemeClr val="dk1"/>
-              </a:solidFill>
-              <a:latin typeface="Calibri"/>
-              <a:ea typeface="Calibri"/>
-              <a:cs typeface="Calibri"/>
-              <a:sym typeface="Calibri"/>
-            </a:endParaRPr>
-          </a:p>
-        </p:txBody>
-      </p:sp>
-      <p:sp>
-        <p:nvSpPr>
-          <p:cNvPr id="570" name="Google Shape;570;p26"/>
           <p:cNvSpPr/>
           <p:nvPr/>
         </p:nvSpPr>
@@ -24587,7 +24496,7 @@
     </p:bg>
     <p:spTree>
       <p:nvGrpSpPr>
-        <p:cNvPr id="575" name="Shape 575"/>
+        <p:cNvPr id="574" name="Shape 574"/>
         <p:cNvGrpSpPr/>
         <p:nvPr/>
       </p:nvGrpSpPr>
@@ -24601,7 +24510,7 @@
       </p:grpSpPr>
       <p:sp>
         <p:nvSpPr>
-          <p:cNvPr id="576" name="Google Shape;576;p27"/>
+          <p:cNvPr id="575" name="Google Shape;575;p27"/>
           <p:cNvSpPr/>
           <p:nvPr/>
         </p:nvSpPr>
@@ -24664,7 +24573,7 @@
       </p:sp>
       <p:sp>
         <p:nvSpPr>
-          <p:cNvPr id="577" name="Google Shape;577;p27"/>
+          <p:cNvPr id="576" name="Google Shape;576;p27"/>
           <p:cNvSpPr/>
           <p:nvPr/>
         </p:nvSpPr>
@@ -24707,7 +24616,7 @@
       </p:sp>
       <p:sp>
         <p:nvSpPr>
-          <p:cNvPr id="578" name="Google Shape;578;p27"/>
+          <p:cNvPr id="577" name="Google Shape;577;p27"/>
           <p:cNvSpPr/>
           <p:nvPr/>
         </p:nvSpPr>
@@ -24770,7 +24679,7 @@
       </p:sp>
       <p:sp>
         <p:nvSpPr>
-          <p:cNvPr id="579" name="Google Shape;579;p27"/>
+          <p:cNvPr id="578" name="Google Shape;578;p27"/>
           <p:cNvSpPr/>
           <p:nvPr/>
         </p:nvSpPr>
@@ -24833,7 +24742,7 @@
       </p:sp>
       <p:sp>
         <p:nvSpPr>
-          <p:cNvPr id="580" name="Google Shape;580;p27"/>
+          <p:cNvPr id="579" name="Google Shape;579;p27"/>
           <p:cNvSpPr/>
           <p:nvPr/>
         </p:nvSpPr>
@@ -24885,7 +24794,7 @@
       </p:sp>
       <p:sp>
         <p:nvSpPr>
-          <p:cNvPr id="581" name="Google Shape;581;p27"/>
+          <p:cNvPr id="580" name="Google Shape;580;p27"/>
           <p:cNvSpPr/>
           <p:nvPr/>
         </p:nvSpPr>
@@ -24928,7 +24837,7 @@
       </p:sp>
       <p:sp>
         <p:nvSpPr>
-          <p:cNvPr id="582" name="Google Shape;582;p27"/>
+          <p:cNvPr id="581" name="Google Shape;581;p27"/>
           <p:cNvSpPr/>
           <p:nvPr/>
         </p:nvSpPr>
@@ -24991,7 +24900,7 @@
       </p:sp>
       <p:sp>
         <p:nvSpPr>
-          <p:cNvPr id="583" name="Google Shape;583;p27"/>
+          <p:cNvPr id="582" name="Google Shape;582;p27"/>
           <p:cNvSpPr/>
           <p:nvPr/>
         </p:nvSpPr>
@@ -25128,7 +25037,7 @@
       </p:sp>
       <p:sp>
         <p:nvSpPr>
-          <p:cNvPr id="584" name="Google Shape;584;p27"/>
+          <p:cNvPr id="583" name="Google Shape;583;p27"/>
           <p:cNvSpPr/>
           <p:nvPr/>
         </p:nvSpPr>
@@ -25191,7 +25100,7 @@
       </p:sp>
       <p:sp>
         <p:nvSpPr>
-          <p:cNvPr id="585" name="Google Shape;585;p27"/>
+          <p:cNvPr id="584" name="Google Shape;584;p27"/>
           <p:cNvSpPr/>
           <p:nvPr/>
         </p:nvSpPr>
@@ -25272,7 +25181,7 @@
     </p:bg>
     <p:spTree>
       <p:nvGrpSpPr>
-        <p:cNvPr id="590" name="Shape 590"/>
+        <p:cNvPr id="589" name="Shape 589"/>
         <p:cNvGrpSpPr/>
         <p:nvPr/>
       </p:nvGrpSpPr>
@@ -25286,7 +25195,7 @@
       </p:grpSpPr>
       <p:sp>
         <p:nvSpPr>
-          <p:cNvPr id="591" name="Google Shape;591;p28"/>
+          <p:cNvPr id="590" name="Google Shape;590;p28"/>
           <p:cNvSpPr/>
           <p:nvPr/>
         </p:nvSpPr>
@@ -25349,7 +25258,7 @@
       </p:sp>
       <p:sp>
         <p:nvSpPr>
-          <p:cNvPr id="592" name="Google Shape;592;p28"/>
+          <p:cNvPr id="591" name="Google Shape;591;p28"/>
           <p:cNvSpPr/>
           <p:nvPr/>
         </p:nvSpPr>
@@ -25392,7 +25301,7 @@
       </p:sp>
       <p:sp>
         <p:nvSpPr>
-          <p:cNvPr id="593" name="Google Shape;593;p28"/>
+          <p:cNvPr id="592" name="Google Shape;592;p28"/>
           <p:cNvSpPr/>
           <p:nvPr/>
         </p:nvSpPr>
@@ -25455,7 +25364,7 @@
       </p:sp>
       <p:sp>
         <p:nvSpPr>
-          <p:cNvPr id="594" name="Google Shape;594;p28"/>
+          <p:cNvPr id="593" name="Google Shape;593;p28"/>
           <p:cNvSpPr/>
           <p:nvPr/>
         </p:nvSpPr>
@@ -25518,7 +25427,7 @@
       </p:sp>
       <p:sp>
         <p:nvSpPr>
-          <p:cNvPr id="595" name="Google Shape;595;p28"/>
+          <p:cNvPr id="594" name="Google Shape;594;p28"/>
           <p:cNvSpPr/>
           <p:nvPr/>
         </p:nvSpPr>
@@ -25570,7 +25479,7 @@
       </p:sp>
       <p:sp>
         <p:nvSpPr>
-          <p:cNvPr id="596" name="Google Shape;596;p28"/>
+          <p:cNvPr id="595" name="Google Shape;595;p28"/>
           <p:cNvSpPr/>
           <p:nvPr/>
         </p:nvSpPr>
@@ -25613,7 +25522,7 @@
       </p:sp>
       <p:sp>
         <p:nvSpPr>
-          <p:cNvPr id="597" name="Google Shape;597;p28"/>
+          <p:cNvPr id="596" name="Google Shape;596;p28"/>
           <p:cNvSpPr/>
           <p:nvPr/>
         </p:nvSpPr>
@@ -25676,7 +25585,7 @@
       </p:sp>
       <p:sp>
         <p:nvSpPr>
-          <p:cNvPr id="598" name="Google Shape;598;p28"/>
+          <p:cNvPr id="597" name="Google Shape;597;p28"/>
           <p:cNvSpPr/>
           <p:nvPr/>
         </p:nvSpPr>
@@ -25776,7 +25685,7 @@
       </p:sp>
       <p:sp>
         <p:nvSpPr>
-          <p:cNvPr id="599" name="Google Shape;599;p28"/>
+          <p:cNvPr id="598" name="Google Shape;598;p28"/>
           <p:cNvSpPr/>
           <p:nvPr/>
         </p:nvSpPr>
@@ -25839,7 +25748,7 @@
       </p:sp>
       <p:sp>
         <p:nvSpPr>
-          <p:cNvPr id="600" name="Google Shape;600;p28"/>
+          <p:cNvPr id="599" name="Google Shape;599;p28"/>
           <p:cNvSpPr/>
           <p:nvPr/>
         </p:nvSpPr>
@@ -25920,7 +25829,7 @@
     </p:bg>
     <p:spTree>
       <p:nvGrpSpPr>
-        <p:cNvPr id="605" name="Shape 605"/>
+        <p:cNvPr id="604" name="Shape 604"/>
         <p:cNvGrpSpPr/>
         <p:nvPr/>
       </p:nvGrpSpPr>
@@ -25934,7 +25843,7 @@
       </p:grpSpPr>
       <p:sp>
         <p:nvSpPr>
-          <p:cNvPr id="606" name="Google Shape;606;p29"/>
+          <p:cNvPr id="605" name="Google Shape;605;p29"/>
           <p:cNvSpPr/>
           <p:nvPr/>
         </p:nvSpPr>
@@ -25997,7 +25906,7 @@
       </p:sp>
       <p:sp>
         <p:nvSpPr>
-          <p:cNvPr id="607" name="Google Shape;607;p29"/>
+          <p:cNvPr id="606" name="Google Shape;606;p29"/>
           <p:cNvSpPr/>
           <p:nvPr/>
         </p:nvSpPr>
@@ -26040,7 +25949,7 @@
       </p:sp>
       <p:sp>
         <p:nvSpPr>
-          <p:cNvPr id="608" name="Google Shape;608;p29"/>
+          <p:cNvPr id="607" name="Google Shape;607;p29"/>
           <p:cNvSpPr/>
           <p:nvPr/>
         </p:nvSpPr>
@@ -26103,7 +26012,7 @@
       </p:sp>
       <p:sp>
         <p:nvSpPr>
-          <p:cNvPr id="609" name="Google Shape;609;p29"/>
+          <p:cNvPr id="608" name="Google Shape;608;p29"/>
           <p:cNvSpPr/>
           <p:nvPr/>
         </p:nvSpPr>
@@ -26166,7 +26075,7 @@
       </p:sp>
       <p:sp>
         <p:nvSpPr>
-          <p:cNvPr id="610" name="Google Shape;610;p29"/>
+          <p:cNvPr id="609" name="Google Shape;609;p29"/>
           <p:cNvSpPr/>
           <p:nvPr/>
         </p:nvSpPr>
@@ -26218,7 +26127,7 @@
       </p:sp>
       <p:sp>
         <p:nvSpPr>
-          <p:cNvPr id="611" name="Google Shape;611;p29"/>
+          <p:cNvPr id="610" name="Google Shape;610;p29"/>
           <p:cNvSpPr/>
           <p:nvPr/>
         </p:nvSpPr>
@@ -26261,7 +26170,7 @@
       </p:sp>
       <p:sp>
         <p:nvSpPr>
-          <p:cNvPr id="612" name="Google Shape;612;p29"/>
+          <p:cNvPr id="611" name="Google Shape;611;p29"/>
           <p:cNvSpPr/>
           <p:nvPr/>
         </p:nvSpPr>
@@ -26324,7 +26233,7 @@
       </p:sp>
       <p:sp>
         <p:nvSpPr>
-          <p:cNvPr id="613" name="Google Shape;613;p29"/>
+          <p:cNvPr id="612" name="Google Shape;612;p29"/>
           <p:cNvSpPr/>
           <p:nvPr/>
         </p:nvSpPr>
@@ -26445,7 +26354,7 @@
                 <a:cs typeface="Calibri"/>
                 <a:sym typeface="Calibri"/>
               </a:rPr>
-              <a:t>La similitud coseno sí distingue la polaridad: good-bad (0.530) es sensiblemente más baja que good-great (0.686). Coseno y PPMI son métricas complementarias, no intercambiables — cada una responde una pregunta distinta.</a:t>
+              <a:t>La similitud coseno sí distingue la polaridad: good-bad (0.504) es sensiblemente más baja que good-great (0.699). Coseno y PPMI son métricas complementarias, no intercambiables — cada una responde una pregunta distinta.</a:t>
             </a:r>
             <a:endParaRPr b="0" i="0" sz="1350" u="none" cap="none" strike="noStrike">
               <a:solidFill>
@@ -26461,7 +26370,7 @@
       </p:sp>
       <p:sp>
         <p:nvSpPr>
-          <p:cNvPr id="614" name="Google Shape;614;p29"/>
+          <p:cNvPr id="613" name="Google Shape;613;p29"/>
           <p:cNvSpPr/>
           <p:nvPr/>
         </p:nvSpPr>
@@ -26524,7 +26433,7 @@
       </p:sp>
       <p:sp>
         <p:nvSpPr>
-          <p:cNvPr id="615" name="Google Shape;615;p29"/>
+          <p:cNvPr id="614" name="Google Shape;614;p29"/>
           <p:cNvSpPr/>
           <p:nvPr/>
         </p:nvSpPr>
@@ -26605,7 +26514,7 @@
     </p:bg>
     <p:spTree>
       <p:nvGrpSpPr>
-        <p:cNvPr id="620" name="Shape 620"/>
+        <p:cNvPr id="619" name="Shape 619"/>
         <p:cNvGrpSpPr/>
         <p:nvPr/>
       </p:nvGrpSpPr>
@@ -26619,7 +26528,7 @@
       </p:grpSpPr>
       <p:sp>
         <p:nvSpPr>
-          <p:cNvPr id="621" name="Google Shape;621;p30"/>
+          <p:cNvPr id="620" name="Google Shape;620;p30"/>
           <p:cNvSpPr/>
           <p:nvPr/>
         </p:nvSpPr>
@@ -26682,7 +26591,7 @@
       </p:sp>
       <p:sp>
         <p:nvSpPr>
-          <p:cNvPr id="622" name="Google Shape;622;p30"/>
+          <p:cNvPr id="621" name="Google Shape;621;p30"/>
           <p:cNvSpPr/>
           <p:nvPr/>
         </p:nvSpPr>
@@ -26725,7 +26634,7 @@
       </p:sp>
       <p:sp>
         <p:nvSpPr>
-          <p:cNvPr id="623" name="Google Shape;623;p30"/>
+          <p:cNvPr id="622" name="Google Shape;622;p30"/>
           <p:cNvSpPr/>
           <p:nvPr/>
         </p:nvSpPr>
@@ -26788,7 +26697,7 @@
       </p:sp>
       <p:sp>
         <p:nvSpPr>
-          <p:cNvPr id="624" name="Google Shape;624;p30"/>
+          <p:cNvPr id="623" name="Google Shape;623;p30"/>
           <p:cNvSpPr/>
           <p:nvPr/>
         </p:nvSpPr>
@@ -26851,7 +26760,7 @@
       </p:sp>
       <p:sp>
         <p:nvSpPr>
-          <p:cNvPr id="625" name="Google Shape;625;p30"/>
+          <p:cNvPr id="624" name="Google Shape;624;p30"/>
           <p:cNvSpPr/>
           <p:nvPr/>
         </p:nvSpPr>
@@ -26903,7 +26812,7 @@
       </p:sp>
       <p:sp>
         <p:nvSpPr>
-          <p:cNvPr id="626" name="Google Shape;626;p30"/>
+          <p:cNvPr id="625" name="Google Shape;625;p30"/>
           <p:cNvSpPr/>
           <p:nvPr/>
         </p:nvSpPr>
@@ -26946,7 +26855,7 @@
       </p:sp>
       <p:sp>
         <p:nvSpPr>
-          <p:cNvPr id="627" name="Google Shape;627;p30"/>
+          <p:cNvPr id="626" name="Google Shape;626;p30"/>
           <p:cNvSpPr/>
           <p:nvPr/>
         </p:nvSpPr>
@@ -27009,7 +26918,7 @@
       </p:sp>
       <p:sp>
         <p:nvSpPr>
-          <p:cNvPr id="628" name="Google Shape;628;p30"/>
+          <p:cNvPr id="627" name="Google Shape;627;p30"/>
           <p:cNvSpPr/>
           <p:nvPr/>
         </p:nvSpPr>
@@ -27146,7 +27055,7 @@
       </p:sp>
       <p:sp>
         <p:nvSpPr>
-          <p:cNvPr id="629" name="Google Shape;629;p30"/>
+          <p:cNvPr id="628" name="Google Shape;628;p30"/>
           <p:cNvSpPr/>
           <p:nvPr/>
         </p:nvSpPr>
@@ -27209,7 +27118,7 @@
       </p:sp>
       <p:sp>
         <p:nvSpPr>
-          <p:cNvPr id="630" name="Google Shape;630;p30"/>
+          <p:cNvPr id="629" name="Google Shape;629;p30"/>
           <p:cNvSpPr/>
           <p:nvPr/>
         </p:nvSpPr>
@@ -27290,7 +27199,7 @@
     </p:bg>
     <p:spTree>
       <p:nvGrpSpPr>
-        <p:cNvPr id="635" name="Shape 635"/>
+        <p:cNvPr id="634" name="Shape 634"/>
         <p:cNvGrpSpPr/>
         <p:nvPr/>
       </p:nvGrpSpPr>
@@ -27304,7 +27213,7 @@
       </p:grpSpPr>
       <p:sp>
         <p:nvSpPr>
-          <p:cNvPr id="636" name="Google Shape;636;p31"/>
+          <p:cNvPr id="635" name="Google Shape;635;p31"/>
           <p:cNvSpPr/>
           <p:nvPr/>
         </p:nvSpPr>
@@ -27367,7 +27276,7 @@
       </p:sp>
       <p:sp>
         <p:nvSpPr>
-          <p:cNvPr id="637" name="Google Shape;637;p31"/>
+          <p:cNvPr id="636" name="Google Shape;636;p31"/>
           <p:cNvSpPr/>
           <p:nvPr/>
         </p:nvSpPr>
@@ -27410,7 +27319,7 @@
       </p:sp>
       <p:sp>
         <p:nvSpPr>
-          <p:cNvPr id="638" name="Google Shape;638;p31"/>
+          <p:cNvPr id="637" name="Google Shape;637;p31"/>
           <p:cNvSpPr/>
           <p:nvPr/>
         </p:nvSpPr>
@@ -27473,7 +27382,7 @@
       </p:sp>
       <p:sp>
         <p:nvSpPr>
-          <p:cNvPr id="639" name="Google Shape;639;p31"/>
+          <p:cNvPr id="638" name="Google Shape;638;p31"/>
           <p:cNvSpPr/>
           <p:nvPr/>
         </p:nvSpPr>
@@ -27536,7 +27445,7 @@
       </p:sp>
       <p:sp>
         <p:nvSpPr>
-          <p:cNvPr id="640" name="Google Shape;640;p31"/>
+          <p:cNvPr id="639" name="Google Shape;639;p31"/>
           <p:cNvSpPr/>
           <p:nvPr/>
         </p:nvSpPr>
@@ -27588,7 +27497,7 @@
       </p:sp>
       <p:sp>
         <p:nvSpPr>
-          <p:cNvPr id="641" name="Google Shape;641;p31"/>
+          <p:cNvPr id="640" name="Google Shape;640;p31"/>
           <p:cNvSpPr/>
           <p:nvPr/>
         </p:nvSpPr>
@@ -27631,7 +27540,7 @@
       </p:sp>
       <p:sp>
         <p:nvSpPr>
-          <p:cNvPr id="642" name="Google Shape;642;p31"/>
+          <p:cNvPr id="641" name="Google Shape;641;p31"/>
           <p:cNvSpPr/>
           <p:nvPr/>
         </p:nvSpPr>
@@ -27694,7 +27603,7 @@
       </p:sp>
       <p:sp>
         <p:nvSpPr>
-          <p:cNvPr id="643" name="Google Shape;643;p31"/>
+          <p:cNvPr id="642" name="Google Shape;642;p31"/>
           <p:cNvSpPr/>
           <p:nvPr/>
         </p:nvSpPr>
@@ -27831,7 +27740,7 @@
       </p:sp>
       <p:sp>
         <p:nvSpPr>
-          <p:cNvPr id="644" name="Google Shape;644;p31"/>
+          <p:cNvPr id="643" name="Google Shape;643;p31"/>
           <p:cNvSpPr/>
           <p:nvPr/>
         </p:nvSpPr>
@@ -27894,7 +27803,7 @@
       </p:sp>
       <p:sp>
         <p:nvSpPr>
-          <p:cNvPr id="645" name="Google Shape;645;p31"/>
+          <p:cNvPr id="644" name="Google Shape;644;p31"/>
           <p:cNvSpPr/>
           <p:nvPr/>
         </p:nvSpPr>
@@ -29388,7 +29297,7 @@
     </p:bg>
     <p:spTree>
       <p:nvGrpSpPr>
-        <p:cNvPr id="650" name="Shape 650"/>
+        <p:cNvPr id="649" name="Shape 649"/>
         <p:cNvGrpSpPr/>
         <p:nvPr/>
       </p:nvGrpSpPr>
@@ -29402,7 +29311,7 @@
       </p:grpSpPr>
       <p:sp>
         <p:nvSpPr>
-          <p:cNvPr id="651" name="Google Shape;651;p32"/>
+          <p:cNvPr id="650" name="Google Shape;650;p32"/>
           <p:cNvSpPr/>
           <p:nvPr/>
         </p:nvSpPr>
@@ -29465,7 +29374,7 @@
       </p:sp>
       <p:sp>
         <p:nvSpPr>
-          <p:cNvPr id="652" name="Google Shape;652;p32"/>
+          <p:cNvPr id="651" name="Google Shape;651;p32"/>
           <p:cNvSpPr/>
           <p:nvPr/>
         </p:nvSpPr>
@@ -29508,7 +29417,7 @@
       </p:sp>
       <p:sp>
         <p:nvSpPr>
-          <p:cNvPr id="653" name="Google Shape;653;p32"/>
+          <p:cNvPr id="652" name="Google Shape;652;p32"/>
           <p:cNvSpPr/>
           <p:nvPr/>
         </p:nvSpPr>
@@ -29571,7 +29480,7 @@
       </p:sp>
       <p:sp>
         <p:nvSpPr>
-          <p:cNvPr id="654" name="Google Shape;654;p32"/>
+          <p:cNvPr id="653" name="Google Shape;653;p32"/>
           <p:cNvSpPr/>
           <p:nvPr/>
         </p:nvSpPr>
@@ -29634,7 +29543,7 @@
       </p:sp>
       <p:sp>
         <p:nvSpPr>
-          <p:cNvPr id="655" name="Google Shape;655;p32"/>
+          <p:cNvPr id="654" name="Google Shape;654;p32"/>
           <p:cNvSpPr/>
           <p:nvPr/>
         </p:nvSpPr>
@@ -29686,7 +29595,7 @@
       </p:sp>
       <p:sp>
         <p:nvSpPr>
-          <p:cNvPr id="656" name="Google Shape;656;p32"/>
+          <p:cNvPr id="655" name="Google Shape;655;p32"/>
           <p:cNvSpPr/>
           <p:nvPr/>
         </p:nvSpPr>
@@ -29729,7 +29638,7 @@
       </p:sp>
       <p:sp>
         <p:nvSpPr>
-          <p:cNvPr id="657" name="Google Shape;657;p32"/>
+          <p:cNvPr id="656" name="Google Shape;656;p32"/>
           <p:cNvSpPr/>
           <p:nvPr/>
         </p:nvSpPr>
@@ -29792,7 +29701,7 @@
       </p:sp>
       <p:sp>
         <p:nvSpPr>
-          <p:cNvPr id="658" name="Google Shape;658;p32"/>
+          <p:cNvPr id="657" name="Google Shape;657;p32"/>
           <p:cNvSpPr/>
           <p:nvPr/>
         </p:nvSpPr>
@@ -29929,7 +29838,7 @@
       </p:sp>
       <p:sp>
         <p:nvSpPr>
-          <p:cNvPr id="659" name="Google Shape;659;p32"/>
+          <p:cNvPr id="658" name="Google Shape;658;p32"/>
           <p:cNvSpPr/>
           <p:nvPr/>
         </p:nvSpPr>
@@ -29992,7 +29901,7 @@
       </p:sp>
       <p:sp>
         <p:nvSpPr>
-          <p:cNvPr id="660" name="Google Shape;660;p32"/>
+          <p:cNvPr id="659" name="Google Shape;659;p32"/>
           <p:cNvSpPr/>
           <p:nvPr/>
         </p:nvSpPr>
@@ -30073,7 +29982,7 @@
     </p:bg>
     <p:spTree>
       <p:nvGrpSpPr>
-        <p:cNvPr id="665" name="Shape 665"/>
+        <p:cNvPr id="664" name="Shape 664"/>
         <p:cNvGrpSpPr/>
         <p:nvPr/>
       </p:nvGrpSpPr>
@@ -30087,7 +29996,7 @@
       </p:grpSpPr>
       <p:sp>
         <p:nvSpPr>
-          <p:cNvPr id="666" name="Google Shape;666;p33"/>
+          <p:cNvPr id="665" name="Google Shape;665;p33"/>
           <p:cNvSpPr/>
           <p:nvPr/>
         </p:nvSpPr>
@@ -30150,7 +30059,7 @@
       </p:sp>
       <p:sp>
         <p:nvSpPr>
-          <p:cNvPr id="667" name="Google Shape;667;p33"/>
+          <p:cNvPr id="666" name="Google Shape;666;p33"/>
           <p:cNvSpPr/>
           <p:nvPr/>
         </p:nvSpPr>
@@ -30193,7 +30102,7 @@
       </p:sp>
       <p:sp>
         <p:nvSpPr>
-          <p:cNvPr id="668" name="Google Shape;668;p33"/>
+          <p:cNvPr id="667" name="Google Shape;667;p33"/>
           <p:cNvSpPr/>
           <p:nvPr/>
         </p:nvSpPr>
@@ -30256,7 +30165,7 @@
       </p:sp>
       <p:sp>
         <p:nvSpPr>
-          <p:cNvPr id="669" name="Google Shape;669;p33"/>
+          <p:cNvPr id="668" name="Google Shape;668;p33"/>
           <p:cNvSpPr/>
           <p:nvPr/>
         </p:nvSpPr>
@@ -30319,7 +30228,7 @@
       </p:sp>
       <p:sp>
         <p:nvSpPr>
-          <p:cNvPr id="670" name="Google Shape;670;p33"/>
+          <p:cNvPr id="669" name="Google Shape;669;p33"/>
           <p:cNvSpPr/>
           <p:nvPr/>
         </p:nvSpPr>
@@ -30371,7 +30280,7 @@
       </p:sp>
       <p:sp>
         <p:nvSpPr>
-          <p:cNvPr id="671" name="Google Shape;671;p33"/>
+          <p:cNvPr id="670" name="Google Shape;670;p33"/>
           <p:cNvSpPr/>
           <p:nvPr/>
         </p:nvSpPr>
@@ -30414,7 +30323,7 @@
       </p:sp>
       <p:sp>
         <p:nvSpPr>
-          <p:cNvPr id="672" name="Google Shape;672;p33"/>
+          <p:cNvPr id="671" name="Google Shape;671;p33"/>
           <p:cNvSpPr/>
           <p:nvPr/>
         </p:nvSpPr>
@@ -30477,7 +30386,7 @@
       </p:sp>
       <p:sp>
         <p:nvSpPr>
-          <p:cNvPr id="673" name="Google Shape;673;p33"/>
+          <p:cNvPr id="672" name="Google Shape;672;p33"/>
           <p:cNvSpPr/>
           <p:nvPr/>
         </p:nvSpPr>
@@ -30524,7 +30433,7 @@
                 <a:cs typeface="Calibri"/>
                 <a:sym typeface="Calibri"/>
               </a:rPr>
-              <a:t>Confirmar y, si hace falta, relanzar el entrenamiento final sobre el 1.6M completo (no una muestra), verificando que el accuracy suba hacia el rango esperado (~78-80%).</a:t>
+              <a:t>Incorporar la clase neutral al entrenamiento, aunque sea con pseudo-etiquetas, para que los modelos propios dejen de tener un punto ciego estructural — es la mejora con mayor impacto esperado, según lo que muestran los resultados actuales.</a:t>
             </a:r>
             <a:endParaRPr b="0" i="0" sz="1350" u="none" cap="none" strike="noStrike">
               <a:solidFill>
@@ -30561,7 +30470,7 @@
                 <a:cs typeface="Calibri"/>
                 <a:sym typeface="Calibri"/>
               </a:rPr>
-              <a:t>Incorporar la clase neutral al entrenamiento, aunque sea con pseudo-etiquetas, para que los modelos propios dejen de tener un punto ciego estructural.</a:t>
+              <a:t>Conseguir o armar un test manual más grande que 498 tweets, para achicar los intervalos de confianza bootstrap (sección 9.4) y poder comparar modelos con más certeza estadística.</a:t>
             </a:r>
             <a:endParaRPr b="0" i="0" sz="1350" u="none" cap="none" strike="noStrike">
               <a:solidFill>
@@ -30598,7 +30507,7 @@
                 <a:cs typeface="Calibri"/>
                 <a:sym typeface="Calibri"/>
               </a:rPr>
-              <a:t>Probar un modelo basado en Transformers (BERT/RoBERTa), que captura contexto, negaciones y sarcasmo mucho mejor que un promedio de embeddings o un vectorizador de bolsa de palabras.</a:t>
+              <a:t>Probar un modelo basado en Transformers (BERT/RoBERTa), que captura contexto, negaciones y sarcasmo mucho mejor que un promedio de embeddings o un vectorizador de bolsa de palabras — el 62% de los errores del mejor modelo no responde a patrones heurísticos simples (sección de análisis de errores).</a:t>
             </a:r>
             <a:endParaRPr b="0" i="0" sz="1350" u="none" cap="none" strike="noStrike">
               <a:solidFill>
@@ -30651,7 +30560,7 @@
       </p:sp>
       <p:sp>
         <p:nvSpPr>
-          <p:cNvPr id="674" name="Google Shape;674;p33"/>
+          <p:cNvPr id="673" name="Google Shape;673;p33"/>
           <p:cNvSpPr/>
           <p:nvPr/>
         </p:nvSpPr>
@@ -30714,7 +30623,7 @@
       </p:sp>
       <p:sp>
         <p:nvSpPr>
-          <p:cNvPr id="675" name="Google Shape;675;p33"/>
+          <p:cNvPr id="674" name="Google Shape;674;p33"/>
           <p:cNvSpPr/>
           <p:nvPr/>
         </p:nvSpPr>
